--- a/24-dars - Animatsiyalar, ularning turlari, tartibi va vaqt parametrlarini boshqarish/24-dars - Slayd.pptx
+++ b/24-dars - Animatsiyalar, ularning turlari, tartibi va vaqt parametrlarini boshqarish/24-dars - Slayd.pptx
@@ -4078,7 +4078,7 @@
                 <a:ea typeface="Calibri" pitchFamily="34" charset="-122"/>
                 <a:cs typeface="Calibri" pitchFamily="34" charset="-120"/>
               </a:rPr>
-              <a:t>PowerPoint taqdimotingdagi har bir obyektга animatsiya qo'lla.</a:t>
+              <a:t>PowerPoint taqdimotingdagi har bir obyektga animatsiya qo'lla.</a:t>
             </a:r>
             <a:endParaRPr lang="en-US" sz="1350" dirty="0"/>
           </a:p>
@@ -4179,7 +4179,7 @@
                 <a:ea typeface="Calibri" pitchFamily="34" charset="-122"/>
                 <a:cs typeface="Calibri" pitchFamily="34" charset="-120"/>
               </a:rPr>
-              <a:t>Barcha matnli obyektларга kirib kelish (yashil) effektini ber.</a:t>
+              <a:t>Barcha matnli obyektlarga kirib kelish (yashil) effektini ber.</a:t>
             </a:r>
             <a:endParaRPr lang="en-US" sz="1350" dirty="0"/>
           </a:p>
@@ -4280,7 +4280,7 @@
                 <a:ea typeface="Calibri" pitchFamily="34" charset="-122"/>
                 <a:cs typeface="Calibri" pitchFamily="34" charset="-120"/>
               </a:rPr>
-              <a:t>Tasvirларга e'tibor jalb qiluvchi (sariq) effektni qo'lla.</a:t>
+              <a:t>Tasvirlarga e'tibor jalb qiluvchi (sariq) effektni qo'lla.</a:t>
             </a:r>
             <a:endParaRPr lang="en-US" sz="1350" dirty="0"/>
           </a:p>
@@ -4482,7 +4482,7 @@
                 <a:ea typeface="Calibri" pitchFamily="34" charset="-122"/>
                 <a:cs typeface="Calibri" pitchFamily="34" charset="-120"/>
               </a:rPr>
-              <a:t>Vaqt parametrlarини sozlab, taqdimotни to'liq namoyish qil.</a:t>
+              <a:t>Vaqt parametrlarini sozlab, taqdimotni to'liq namoyish qil.</a:t>
             </a:r>
             <a:endParaRPr lang="en-US" sz="1350" dirty="0"/>
           </a:p>
@@ -4881,7 +4881,7 @@
                 <a:ea typeface="Calibri" pitchFamily="34" charset="-122"/>
                 <a:cs typeface="Calibri" pitchFamily="34" charset="-120"/>
               </a:rPr>
-              <a:t>Animatsiya tartibi qayerда boshqariladi?</a:t>
+              <a:t>Animatsiya tartibi qayerda boshqariladi?</a:t>
             </a:r>
             <a:endParaRPr lang="en-US" sz="1300" dirty="0"/>
           </a:p>
@@ -5096,7 +5096,7 @@
                 <a:ea typeface="Calibri" pitchFamily="34" charset="-122"/>
                 <a:cs typeface="Calibri" pitchFamily="34" charset="-120"/>
               </a:rPr>
-              <a:t>Bitta slaydда 3 ta obyektга har xil animatsiya qo'llab, ularning ketma-ketligini sozlang.</a:t>
+              <a:t>Bitta slaydda 3 ta obyektga har xil animatsiya qo'llab, ularning ketma-ketligini sozlang.</a:t>
             </a:r>
             <a:endParaRPr lang="en-US" sz="1450" dirty="0"/>
           </a:p>
